--- a/articles/assets.pptx
+++ b/articles/assets.pptx
@@ -5,8 +5,10 @@
     <p:sldMasterId id="2147483648" r:id="rId1"/>
   </p:sldMasterIdLst>
   <p:sldIdLst>
-    <p:sldId id="256" r:id="rId2"/>
-    <p:sldId id="257" r:id="rId3"/>
+    <p:sldId id="260" r:id="rId2"/>
+    <p:sldId id="256" r:id="rId3"/>
+    <p:sldId id="257" r:id="rId4"/>
+    <p:sldId id="261" r:id="rId5"/>
   </p:sldIdLst>
   <p:sldSz cx="12192000" cy="6858000"/>
   <p:notesSz cx="6858000" cy="9144000"/>
@@ -262,7 +264,7 @@
           <a:p>
             <a:fld id="{74DA02C1-9A06-452D-9069-E428247CCD0E}" type="datetimeFigureOut">
               <a:rPr lang="en-GB" smtClean="0"/>
-              <a:t>10/06/2025</a:t>
+              <a:t>18/04/2026</a:t>
             </a:fld>
             <a:endParaRPr lang="en-GB"/>
           </a:p>
@@ -462,7 +464,7 @@
           <a:p>
             <a:fld id="{74DA02C1-9A06-452D-9069-E428247CCD0E}" type="datetimeFigureOut">
               <a:rPr lang="en-GB" smtClean="0"/>
-              <a:t>10/06/2025</a:t>
+              <a:t>18/04/2026</a:t>
             </a:fld>
             <a:endParaRPr lang="en-GB"/>
           </a:p>
@@ -672,7 +674,7 @@
           <a:p>
             <a:fld id="{74DA02C1-9A06-452D-9069-E428247CCD0E}" type="datetimeFigureOut">
               <a:rPr lang="en-GB" smtClean="0"/>
-              <a:t>10/06/2025</a:t>
+              <a:t>18/04/2026</a:t>
             </a:fld>
             <a:endParaRPr lang="en-GB"/>
           </a:p>
@@ -872,7 +874,7 @@
           <a:p>
             <a:fld id="{74DA02C1-9A06-452D-9069-E428247CCD0E}" type="datetimeFigureOut">
               <a:rPr lang="en-GB" smtClean="0"/>
-              <a:t>10/06/2025</a:t>
+              <a:t>18/04/2026</a:t>
             </a:fld>
             <a:endParaRPr lang="en-GB"/>
           </a:p>
@@ -1148,7 +1150,7 @@
           <a:p>
             <a:fld id="{74DA02C1-9A06-452D-9069-E428247CCD0E}" type="datetimeFigureOut">
               <a:rPr lang="en-GB" smtClean="0"/>
-              <a:t>10/06/2025</a:t>
+              <a:t>18/04/2026</a:t>
             </a:fld>
             <a:endParaRPr lang="en-GB"/>
           </a:p>
@@ -1416,7 +1418,7 @@
           <a:p>
             <a:fld id="{74DA02C1-9A06-452D-9069-E428247CCD0E}" type="datetimeFigureOut">
               <a:rPr lang="en-GB" smtClean="0"/>
-              <a:t>10/06/2025</a:t>
+              <a:t>18/04/2026</a:t>
             </a:fld>
             <a:endParaRPr lang="en-GB"/>
           </a:p>
@@ -1831,7 +1833,7 @@
           <a:p>
             <a:fld id="{74DA02C1-9A06-452D-9069-E428247CCD0E}" type="datetimeFigureOut">
               <a:rPr lang="en-GB" smtClean="0"/>
-              <a:t>10/06/2025</a:t>
+              <a:t>18/04/2026</a:t>
             </a:fld>
             <a:endParaRPr lang="en-GB"/>
           </a:p>
@@ -1973,7 +1975,7 @@
           <a:p>
             <a:fld id="{74DA02C1-9A06-452D-9069-E428247CCD0E}" type="datetimeFigureOut">
               <a:rPr lang="en-GB" smtClean="0"/>
-              <a:t>10/06/2025</a:t>
+              <a:t>18/04/2026</a:t>
             </a:fld>
             <a:endParaRPr lang="en-GB"/>
           </a:p>
@@ -2086,7 +2088,7 @@
           <a:p>
             <a:fld id="{74DA02C1-9A06-452D-9069-E428247CCD0E}" type="datetimeFigureOut">
               <a:rPr lang="en-GB" smtClean="0"/>
-              <a:t>10/06/2025</a:t>
+              <a:t>18/04/2026</a:t>
             </a:fld>
             <a:endParaRPr lang="en-GB"/>
           </a:p>
@@ -2399,7 +2401,7 @@
           <a:p>
             <a:fld id="{74DA02C1-9A06-452D-9069-E428247CCD0E}" type="datetimeFigureOut">
               <a:rPr lang="en-GB" smtClean="0"/>
-              <a:t>10/06/2025</a:t>
+              <a:t>18/04/2026</a:t>
             </a:fld>
             <a:endParaRPr lang="en-GB"/>
           </a:p>
@@ -2692,7 +2694,7 @@
           <a:p>
             <a:fld id="{74DA02C1-9A06-452D-9069-E428247CCD0E}" type="datetimeFigureOut">
               <a:rPr lang="en-GB" smtClean="0"/>
-              <a:t>10/06/2025</a:t>
+              <a:t>18/04/2026</a:t>
             </a:fld>
             <a:endParaRPr lang="en-GB"/>
           </a:p>
@@ -2935,7 +2937,7 @@
           <a:p>
             <a:fld id="{74DA02C1-9A06-452D-9069-E428247CCD0E}" type="datetimeFigureOut">
               <a:rPr lang="en-GB" smtClean="0"/>
-              <a:t>10/06/2025</a:t>
+              <a:t>18/04/2026</a:t>
             </a:fld>
             <a:endParaRPr lang="en-GB"/>
           </a:p>
@@ -3340,6 +3342,502 @@
   <p:cSld>
     <p:spTree>
       <p:nvGrpSpPr>
+        <p:cNvPr id="1" name="">
+          <a:extLst>
+            <a:ext uri="{FF2B5EF4-FFF2-40B4-BE49-F238E27FC236}">
+              <a16:creationId xmlns:a16="http://schemas.microsoft.com/office/drawing/2014/main" id="{79EFDFEE-4A03-588C-BF30-A85658588D78}"/>
+            </a:ext>
+          </a:extLst>
+        </p:cNvPr>
+        <p:cNvGrpSpPr/>
+        <p:nvPr/>
+      </p:nvGrpSpPr>
+      <p:grpSpPr>
+        <a:xfrm>
+          <a:off x="0" y="0"/>
+          <a:ext cx="0" cy="0"/>
+          <a:chOff x="0" y="0"/>
+          <a:chExt cx="0" cy="0"/>
+        </a:xfrm>
+      </p:grpSpPr>
+      <p:sp>
+        <p:nvSpPr>
+          <p:cNvPr id="21" name="Rectangle 20">
+            <a:extLst>
+              <a:ext uri="{FF2B5EF4-FFF2-40B4-BE49-F238E27FC236}">
+                <a16:creationId xmlns:a16="http://schemas.microsoft.com/office/drawing/2014/main" id="{D5A78798-7187-1C2B-8B4E-0128FA442FD7}"/>
+              </a:ext>
+            </a:extLst>
+          </p:cNvPr>
+          <p:cNvSpPr/>
+          <p:nvPr/>
+        </p:nvSpPr>
+        <p:spPr>
+          <a:xfrm>
+            <a:off x="450669" y="0"/>
+            <a:ext cx="11741331" cy="6858000"/>
+          </a:xfrm>
+          <a:prstGeom prst="rect">
+            <a:avLst/>
+          </a:prstGeom>
+          <a:noFill/>
+          <a:ln>
+            <a:noFill/>
+          </a:ln>
+        </p:spPr>
+        <p:style>
+          <a:lnRef idx="2">
+            <a:schemeClr val="accent1">
+              <a:shade val="15000"/>
+            </a:schemeClr>
+          </a:lnRef>
+          <a:fillRef idx="1">
+            <a:schemeClr val="accent1"/>
+          </a:fillRef>
+          <a:effectRef idx="0">
+            <a:schemeClr val="accent1"/>
+          </a:effectRef>
+          <a:fontRef idx="minor">
+            <a:schemeClr val="lt1"/>
+          </a:fontRef>
+        </p:style>
+        <p:txBody>
+          <a:bodyPr rtlCol="0" anchor="ctr"/>
+          <a:lstStyle/>
+          <a:p>
+            <a:pPr algn="ctr"/>
+            <a:endParaRPr lang="en-GB"/>
+          </a:p>
+        </p:txBody>
+      </p:sp>
+      <p:cxnSp>
+        <p:nvCxnSpPr>
+          <p:cNvPr id="5" name="Straight Connector 4">
+            <a:extLst>
+              <a:ext uri="{FF2B5EF4-FFF2-40B4-BE49-F238E27FC236}">
+                <a16:creationId xmlns:a16="http://schemas.microsoft.com/office/drawing/2014/main" id="{C3E14725-DE09-A2EF-6553-F356F950AD17}"/>
+              </a:ext>
+            </a:extLst>
+          </p:cNvPr>
+          <p:cNvCxnSpPr>
+            <a:cxnSpLocks/>
+          </p:cNvCxnSpPr>
+          <p:nvPr/>
+        </p:nvCxnSpPr>
+        <p:spPr>
+          <a:xfrm>
+            <a:off x="1352550" y="6505031"/>
+            <a:ext cx="9486900" cy="0"/>
+          </a:xfrm>
+          <a:prstGeom prst="line">
+            <a:avLst/>
+          </a:prstGeom>
+          <a:ln w="127000">
+            <a:solidFill>
+              <a:schemeClr val="tx2">
+                <a:lumMod val="40000"/>
+                <a:lumOff val="60000"/>
+              </a:schemeClr>
+            </a:solidFill>
+          </a:ln>
+        </p:spPr>
+        <p:style>
+          <a:lnRef idx="2">
+            <a:schemeClr val="accent1"/>
+          </a:lnRef>
+          <a:fillRef idx="0">
+            <a:schemeClr val="accent1"/>
+          </a:fillRef>
+          <a:effectRef idx="1">
+            <a:schemeClr val="accent1"/>
+          </a:effectRef>
+          <a:fontRef idx="minor">
+            <a:schemeClr val="tx1"/>
+          </a:fontRef>
+        </p:style>
+      </p:cxnSp>
+      <p:sp>
+        <p:nvSpPr>
+          <p:cNvPr id="7" name="Rectangle 6">
+            <a:extLst>
+              <a:ext uri="{FF2B5EF4-FFF2-40B4-BE49-F238E27FC236}">
+                <a16:creationId xmlns:a16="http://schemas.microsoft.com/office/drawing/2014/main" id="{0F60610A-40D5-9DBF-E506-3C01491F41A8}"/>
+              </a:ext>
+            </a:extLst>
+          </p:cNvPr>
+          <p:cNvSpPr/>
+          <p:nvPr/>
+        </p:nvSpPr>
+        <p:spPr>
+          <a:xfrm>
+            <a:off x="2429390" y="5229000"/>
+            <a:ext cx="900000" cy="900000"/>
+          </a:xfrm>
+          <a:prstGeom prst="rect">
+            <a:avLst/>
+          </a:prstGeom>
+          <a:solidFill>
+            <a:schemeClr val="accent1"/>
+          </a:solidFill>
+          <a:ln w="63500">
+            <a:solidFill>
+              <a:schemeClr val="accent1">
+                <a:lumMod val="75000"/>
+              </a:schemeClr>
+            </a:solidFill>
+          </a:ln>
+        </p:spPr>
+        <p:style>
+          <a:lnRef idx="2">
+            <a:schemeClr val="accent1">
+              <a:shade val="15000"/>
+            </a:schemeClr>
+          </a:lnRef>
+          <a:fillRef idx="1">
+            <a:schemeClr val="accent1"/>
+          </a:fillRef>
+          <a:effectRef idx="0">
+            <a:schemeClr val="accent1"/>
+          </a:effectRef>
+          <a:fontRef idx="minor">
+            <a:schemeClr val="lt1"/>
+          </a:fontRef>
+        </p:style>
+        <p:txBody>
+          <a:bodyPr tIns="180000" rtlCol="0" anchor="t"/>
+          <a:lstStyle/>
+          <a:p>
+            <a:pPr algn="ctr"/>
+            <a:r>
+              <a:rPr lang="en-GB" sz="4200" dirty="0">
+                <a:latin typeface="Sora" pitchFamily="2" charset="0"/>
+                <a:cs typeface="Sora" pitchFamily="2" charset="0"/>
+              </a:rPr>
+              <a:t>1</a:t>
+            </a:r>
+          </a:p>
+        </p:txBody>
+      </p:sp>
+      <p:sp>
+        <p:nvSpPr>
+          <p:cNvPr id="8" name="Rectangle 7">
+            <a:extLst>
+              <a:ext uri="{FF2B5EF4-FFF2-40B4-BE49-F238E27FC236}">
+                <a16:creationId xmlns:a16="http://schemas.microsoft.com/office/drawing/2014/main" id="{212680DC-714A-995F-9C80-1728BAC980EE}"/>
+              </a:ext>
+            </a:extLst>
+          </p:cNvPr>
+          <p:cNvSpPr/>
+          <p:nvPr/>
+        </p:nvSpPr>
+        <p:spPr>
+          <a:xfrm>
+            <a:off x="3716034" y="4329000"/>
+            <a:ext cx="900000" cy="1800000"/>
+          </a:xfrm>
+          <a:prstGeom prst="rect">
+            <a:avLst/>
+          </a:prstGeom>
+          <a:solidFill>
+            <a:srgbClr val="58C78D"/>
+          </a:solidFill>
+          <a:ln w="63500">
+            <a:solidFill>
+              <a:schemeClr val="accent3">
+                <a:lumMod val="50000"/>
+              </a:schemeClr>
+            </a:solidFill>
+          </a:ln>
+        </p:spPr>
+        <p:style>
+          <a:lnRef idx="2">
+            <a:schemeClr val="accent1">
+              <a:shade val="15000"/>
+            </a:schemeClr>
+          </a:lnRef>
+          <a:fillRef idx="1">
+            <a:schemeClr val="accent1"/>
+          </a:fillRef>
+          <a:effectRef idx="0">
+            <a:schemeClr val="accent1"/>
+          </a:effectRef>
+          <a:fontRef idx="minor">
+            <a:schemeClr val="lt1"/>
+          </a:fontRef>
+        </p:style>
+        <p:txBody>
+          <a:bodyPr tIns="180000" rtlCol="0" anchor="t"/>
+          <a:lstStyle/>
+          <a:p>
+            <a:pPr algn="ctr"/>
+            <a:r>
+              <a:rPr lang="en-GB" sz="4200" dirty="0">
+                <a:latin typeface="Sora" pitchFamily="2" charset="0"/>
+                <a:cs typeface="Sora" pitchFamily="2" charset="0"/>
+              </a:rPr>
+              <a:t>2</a:t>
+            </a:r>
+          </a:p>
+        </p:txBody>
+      </p:sp>
+      <p:sp>
+        <p:nvSpPr>
+          <p:cNvPr id="9" name="Rectangle 8">
+            <a:extLst>
+              <a:ext uri="{FF2B5EF4-FFF2-40B4-BE49-F238E27FC236}">
+                <a16:creationId xmlns:a16="http://schemas.microsoft.com/office/drawing/2014/main" id="{61990B69-2064-0FF4-F400-BA76C8E637F2}"/>
+              </a:ext>
+            </a:extLst>
+          </p:cNvPr>
+          <p:cNvSpPr/>
+          <p:nvPr/>
+        </p:nvSpPr>
+        <p:spPr>
+          <a:xfrm>
+            <a:off x="5002678" y="3429000"/>
+            <a:ext cx="900000" cy="2700000"/>
+          </a:xfrm>
+          <a:prstGeom prst="rect">
+            <a:avLst/>
+          </a:prstGeom>
+          <a:solidFill>
+            <a:srgbClr val="FFAE79"/>
+          </a:solidFill>
+          <a:ln w="63500">
+            <a:solidFill>
+              <a:srgbClr val="F38D47"/>
+            </a:solidFill>
+          </a:ln>
+        </p:spPr>
+        <p:style>
+          <a:lnRef idx="2">
+            <a:schemeClr val="accent1">
+              <a:shade val="15000"/>
+            </a:schemeClr>
+          </a:lnRef>
+          <a:fillRef idx="1">
+            <a:schemeClr val="accent1"/>
+          </a:fillRef>
+          <a:effectRef idx="0">
+            <a:schemeClr val="accent1"/>
+          </a:effectRef>
+          <a:fontRef idx="minor">
+            <a:schemeClr val="lt1"/>
+          </a:fontRef>
+        </p:style>
+        <p:txBody>
+          <a:bodyPr tIns="180000" rtlCol="0" anchor="t"/>
+          <a:lstStyle/>
+          <a:p>
+            <a:pPr algn="ctr"/>
+            <a:r>
+              <a:rPr lang="en-GB" sz="4200" dirty="0">
+                <a:latin typeface="Sora" pitchFamily="2" charset="0"/>
+                <a:cs typeface="Sora" pitchFamily="2" charset="0"/>
+              </a:rPr>
+              <a:t>3</a:t>
+            </a:r>
+          </a:p>
+        </p:txBody>
+      </p:sp>
+      <p:sp>
+        <p:nvSpPr>
+          <p:cNvPr id="10" name="Rectangle 9">
+            <a:extLst>
+              <a:ext uri="{FF2B5EF4-FFF2-40B4-BE49-F238E27FC236}">
+                <a16:creationId xmlns:a16="http://schemas.microsoft.com/office/drawing/2014/main" id="{4F29BC9D-87B1-81A0-EE00-55336CE9C83D}"/>
+              </a:ext>
+            </a:extLst>
+          </p:cNvPr>
+          <p:cNvSpPr/>
+          <p:nvPr/>
+        </p:nvSpPr>
+        <p:spPr>
+          <a:xfrm>
+            <a:off x="6289322" y="2529000"/>
+            <a:ext cx="900000" cy="3600000"/>
+          </a:xfrm>
+          <a:prstGeom prst="rect">
+            <a:avLst/>
+          </a:prstGeom>
+          <a:solidFill>
+            <a:srgbClr val="04B4BD"/>
+          </a:solidFill>
+          <a:ln w="63500">
+            <a:solidFill>
+              <a:srgbClr val="03989F"/>
+            </a:solidFill>
+          </a:ln>
+        </p:spPr>
+        <p:style>
+          <a:lnRef idx="2">
+            <a:schemeClr val="accent1">
+              <a:shade val="15000"/>
+            </a:schemeClr>
+          </a:lnRef>
+          <a:fillRef idx="1">
+            <a:schemeClr val="accent1"/>
+          </a:fillRef>
+          <a:effectRef idx="0">
+            <a:schemeClr val="accent1"/>
+          </a:effectRef>
+          <a:fontRef idx="minor">
+            <a:schemeClr val="lt1"/>
+          </a:fontRef>
+        </p:style>
+        <p:txBody>
+          <a:bodyPr tIns="180000" rtlCol="0" anchor="t"/>
+          <a:lstStyle/>
+          <a:p>
+            <a:pPr algn="ctr"/>
+            <a:r>
+              <a:rPr lang="en-GB" sz="4200" dirty="0">
+                <a:latin typeface="Sora" pitchFamily="2" charset="0"/>
+                <a:cs typeface="Sora" pitchFamily="2" charset="0"/>
+              </a:rPr>
+              <a:t>4</a:t>
+            </a:r>
+          </a:p>
+        </p:txBody>
+      </p:sp>
+      <p:sp>
+        <p:nvSpPr>
+          <p:cNvPr id="2" name="Rectangle 1">
+            <a:extLst>
+              <a:ext uri="{FF2B5EF4-FFF2-40B4-BE49-F238E27FC236}">
+                <a16:creationId xmlns:a16="http://schemas.microsoft.com/office/drawing/2014/main" id="{D9B40DD8-B2B5-17F7-CE70-B2276CFB5B5A}"/>
+              </a:ext>
+            </a:extLst>
+          </p:cNvPr>
+          <p:cNvSpPr/>
+          <p:nvPr/>
+        </p:nvSpPr>
+        <p:spPr>
+          <a:xfrm>
+            <a:off x="7575966" y="1629000"/>
+            <a:ext cx="900000" cy="4500000"/>
+          </a:xfrm>
+          <a:prstGeom prst="rect">
+            <a:avLst/>
+          </a:prstGeom>
+          <a:solidFill>
+            <a:srgbClr val="B79BF8"/>
+          </a:solidFill>
+          <a:ln w="63500">
+            <a:solidFill>
+              <a:srgbClr val="A37EF6"/>
+            </a:solidFill>
+          </a:ln>
+        </p:spPr>
+        <p:style>
+          <a:lnRef idx="2">
+            <a:schemeClr val="accent1">
+              <a:shade val="15000"/>
+            </a:schemeClr>
+          </a:lnRef>
+          <a:fillRef idx="1">
+            <a:schemeClr val="accent1"/>
+          </a:fillRef>
+          <a:effectRef idx="0">
+            <a:schemeClr val="accent1"/>
+          </a:effectRef>
+          <a:fontRef idx="minor">
+            <a:schemeClr val="lt1"/>
+          </a:fontRef>
+        </p:style>
+        <p:txBody>
+          <a:bodyPr tIns="180000" rtlCol="0" anchor="t"/>
+          <a:lstStyle/>
+          <a:p>
+            <a:pPr algn="ctr"/>
+            <a:r>
+              <a:rPr lang="en-GB" sz="4200" dirty="0">
+                <a:latin typeface="Sora" pitchFamily="2" charset="0"/>
+                <a:cs typeface="Sora" pitchFamily="2" charset="0"/>
+              </a:rPr>
+              <a:t>5</a:t>
+            </a:r>
+          </a:p>
+        </p:txBody>
+      </p:sp>
+      <p:sp>
+        <p:nvSpPr>
+          <p:cNvPr id="6" name="Rectangle 5">
+            <a:extLst>
+              <a:ext uri="{FF2B5EF4-FFF2-40B4-BE49-F238E27FC236}">
+                <a16:creationId xmlns:a16="http://schemas.microsoft.com/office/drawing/2014/main" id="{0FC718B7-78EB-A812-D314-759C5BAFCE56}"/>
+              </a:ext>
+            </a:extLst>
+          </p:cNvPr>
+          <p:cNvSpPr/>
+          <p:nvPr/>
+        </p:nvSpPr>
+        <p:spPr>
+          <a:xfrm>
+            <a:off x="8862610" y="729000"/>
+            <a:ext cx="900000" cy="5400000"/>
+          </a:xfrm>
+          <a:prstGeom prst="rect">
+            <a:avLst/>
+          </a:prstGeom>
+          <a:solidFill>
+            <a:srgbClr val="F190F1"/>
+          </a:solidFill>
+          <a:ln w="63500">
+            <a:solidFill>
+              <a:srgbClr val="EF81EF"/>
+            </a:solidFill>
+          </a:ln>
+        </p:spPr>
+        <p:style>
+          <a:lnRef idx="2">
+            <a:schemeClr val="accent1">
+              <a:shade val="15000"/>
+            </a:schemeClr>
+          </a:lnRef>
+          <a:fillRef idx="1">
+            <a:schemeClr val="accent1"/>
+          </a:fillRef>
+          <a:effectRef idx="0">
+            <a:schemeClr val="accent1"/>
+          </a:effectRef>
+          <a:fontRef idx="minor">
+            <a:schemeClr val="lt1"/>
+          </a:fontRef>
+        </p:style>
+        <p:txBody>
+          <a:bodyPr tIns="180000" rtlCol="0" anchor="t"/>
+          <a:lstStyle/>
+          <a:p>
+            <a:pPr algn="ctr"/>
+            <a:r>
+              <a:rPr lang="en-GB" sz="4200" dirty="0">
+                <a:latin typeface="Sora" pitchFamily="2" charset="0"/>
+                <a:cs typeface="Sora" pitchFamily="2" charset="0"/>
+              </a:rPr>
+              <a:t>6</a:t>
+            </a:r>
+          </a:p>
+        </p:txBody>
+      </p:sp>
+    </p:spTree>
+    <p:extLst>
+      <p:ext uri="{BB962C8B-B14F-4D97-AF65-F5344CB8AC3E}">
+        <p14:creationId xmlns:p14="http://schemas.microsoft.com/office/powerpoint/2010/main" val="407000086"/>
+      </p:ext>
+    </p:extLst>
+  </p:cSld>
+  <p:clrMapOvr>
+    <a:masterClrMapping/>
+  </p:clrMapOvr>
+</p:sld>
+</file>
+
+<file path=ppt/slides/slide2.xml><?xml version="1.0" encoding="utf-8"?>
+<p:sld xmlns:a="http://schemas.openxmlformats.org/drawingml/2006/main" xmlns:r="http://schemas.openxmlformats.org/officeDocument/2006/relationships" xmlns:p="http://schemas.openxmlformats.org/presentationml/2006/main">
+  <p:cSld>
+    <p:spTree>
+      <p:nvGrpSpPr>
         <p:cNvPr id="1" name=""/>
         <p:cNvGrpSpPr/>
         <p:nvPr/>
@@ -3889,7 +4387,7 @@
 </p:sld>
 </file>
 
-<file path=ppt/slides/slide2.xml><?xml version="1.0" encoding="utf-8"?>
+<file path=ppt/slides/slide3.xml><?xml version="1.0" encoding="utf-8"?>
 <p:sld xmlns:a="http://schemas.openxmlformats.org/drawingml/2006/main" xmlns:r="http://schemas.openxmlformats.org/officeDocument/2006/relationships" xmlns:p="http://schemas.openxmlformats.org/presentationml/2006/main">
   <p:cSld>
     <p:spTree>
@@ -4484,6 +4982,725 @@
     <p:extLst>
       <p:ext uri="{BB962C8B-B14F-4D97-AF65-F5344CB8AC3E}">
         <p14:creationId xmlns:p14="http://schemas.microsoft.com/office/powerpoint/2010/main" val="3010518446"/>
+      </p:ext>
+    </p:extLst>
+  </p:cSld>
+  <p:clrMapOvr>
+    <a:masterClrMapping/>
+  </p:clrMapOvr>
+</p:sld>
+</file>
+
+<file path=ppt/slides/slide4.xml><?xml version="1.0" encoding="utf-8"?>
+<p:sld xmlns:a="http://schemas.openxmlformats.org/drawingml/2006/main" xmlns:r="http://schemas.openxmlformats.org/officeDocument/2006/relationships" xmlns:p="http://schemas.openxmlformats.org/presentationml/2006/main">
+  <p:cSld>
+    <p:spTree>
+      <p:nvGrpSpPr>
+        <p:cNvPr id="1" name="">
+          <a:extLst>
+            <a:ext uri="{FF2B5EF4-FFF2-40B4-BE49-F238E27FC236}">
+              <a16:creationId xmlns:a16="http://schemas.microsoft.com/office/drawing/2014/main" id="{43441FB8-13F6-1EDC-C0E9-3DFF391190AA}"/>
+            </a:ext>
+          </a:extLst>
+        </p:cNvPr>
+        <p:cNvGrpSpPr/>
+        <p:nvPr/>
+      </p:nvGrpSpPr>
+      <p:grpSpPr>
+        <a:xfrm>
+          <a:off x="0" y="0"/>
+          <a:ext cx="0" cy="0"/>
+          <a:chOff x="0" y="0"/>
+          <a:chExt cx="0" cy="0"/>
+        </a:xfrm>
+      </p:grpSpPr>
+      <p:sp>
+        <p:nvSpPr>
+          <p:cNvPr id="21" name="Rectangle 20">
+            <a:extLst>
+              <a:ext uri="{FF2B5EF4-FFF2-40B4-BE49-F238E27FC236}">
+                <a16:creationId xmlns:a16="http://schemas.microsoft.com/office/drawing/2014/main" id="{8EA3EF24-10B6-AA58-431D-A02906480024}"/>
+              </a:ext>
+            </a:extLst>
+          </p:cNvPr>
+          <p:cNvSpPr/>
+          <p:nvPr/>
+        </p:nvSpPr>
+        <p:spPr>
+          <a:xfrm>
+            <a:off x="450670" y="0"/>
+            <a:ext cx="10783388" cy="6858000"/>
+          </a:xfrm>
+          <a:prstGeom prst="rect">
+            <a:avLst/>
+          </a:prstGeom>
+          <a:noFill/>
+          <a:ln>
+            <a:noFill/>
+          </a:ln>
+        </p:spPr>
+        <p:style>
+          <a:lnRef idx="2">
+            <a:schemeClr val="accent1">
+              <a:shade val="15000"/>
+            </a:schemeClr>
+          </a:lnRef>
+          <a:fillRef idx="1">
+            <a:schemeClr val="accent1"/>
+          </a:fillRef>
+          <a:effectRef idx="0">
+            <a:schemeClr val="accent1"/>
+          </a:effectRef>
+          <a:fontRef idx="minor">
+            <a:schemeClr val="lt1"/>
+          </a:fontRef>
+        </p:style>
+        <p:txBody>
+          <a:bodyPr rtlCol="0" anchor="ctr"/>
+          <a:lstStyle/>
+          <a:p>
+            <a:pPr algn="ctr"/>
+            <a:endParaRPr lang="en-GB"/>
+          </a:p>
+        </p:txBody>
+      </p:sp>
+      <p:cxnSp>
+        <p:nvCxnSpPr>
+          <p:cNvPr id="5" name="Straight Connector 4">
+            <a:extLst>
+              <a:ext uri="{FF2B5EF4-FFF2-40B4-BE49-F238E27FC236}">
+                <a16:creationId xmlns:a16="http://schemas.microsoft.com/office/drawing/2014/main" id="{C786B08D-F9E7-1EEC-48FE-C529756F5C20}"/>
+              </a:ext>
+            </a:extLst>
+          </p:cNvPr>
+          <p:cNvCxnSpPr>
+            <a:cxnSpLocks/>
+          </p:cNvCxnSpPr>
+          <p:nvPr/>
+        </p:nvCxnSpPr>
+        <p:spPr>
+          <a:xfrm>
+            <a:off x="1352550" y="6505031"/>
+            <a:ext cx="9486900" cy="0"/>
+          </a:xfrm>
+          <a:prstGeom prst="line">
+            <a:avLst/>
+          </a:prstGeom>
+          <a:ln w="127000">
+            <a:solidFill>
+              <a:schemeClr val="tx2">
+                <a:lumMod val="40000"/>
+                <a:lumOff val="60000"/>
+              </a:schemeClr>
+            </a:solidFill>
+          </a:ln>
+        </p:spPr>
+        <p:style>
+          <a:lnRef idx="2">
+            <a:schemeClr val="accent1"/>
+          </a:lnRef>
+          <a:fillRef idx="0">
+            <a:schemeClr val="accent1"/>
+          </a:fillRef>
+          <a:effectRef idx="1">
+            <a:schemeClr val="accent1"/>
+          </a:effectRef>
+          <a:fontRef idx="minor">
+            <a:schemeClr val="tx1"/>
+          </a:fontRef>
+        </p:style>
+      </p:cxnSp>
+      <p:sp>
+        <p:nvSpPr>
+          <p:cNvPr id="9" name="Rectangle 8">
+            <a:extLst>
+              <a:ext uri="{FF2B5EF4-FFF2-40B4-BE49-F238E27FC236}">
+                <a16:creationId xmlns:a16="http://schemas.microsoft.com/office/drawing/2014/main" id="{19FA9BB2-CB0E-6554-6B77-CD7A49026C96}"/>
+              </a:ext>
+            </a:extLst>
+          </p:cNvPr>
+          <p:cNvSpPr/>
+          <p:nvPr/>
+        </p:nvSpPr>
+        <p:spPr>
+          <a:xfrm>
+            <a:off x="5002678" y="3429000"/>
+            <a:ext cx="900000" cy="2700000"/>
+          </a:xfrm>
+          <a:prstGeom prst="rect">
+            <a:avLst/>
+          </a:prstGeom>
+          <a:solidFill>
+            <a:schemeClr val="tx2">
+              <a:lumMod val="60000"/>
+              <a:lumOff val="40000"/>
+            </a:schemeClr>
+          </a:solidFill>
+          <a:ln w="63500">
+            <a:solidFill>
+              <a:schemeClr val="tx2"/>
+            </a:solidFill>
+          </a:ln>
+        </p:spPr>
+        <p:style>
+          <a:lnRef idx="2">
+            <a:schemeClr val="accent1">
+              <a:shade val="15000"/>
+            </a:schemeClr>
+          </a:lnRef>
+          <a:fillRef idx="1">
+            <a:schemeClr val="accent1"/>
+          </a:fillRef>
+          <a:effectRef idx="0">
+            <a:schemeClr val="accent1"/>
+          </a:effectRef>
+          <a:fontRef idx="minor">
+            <a:schemeClr val="lt1"/>
+          </a:fontRef>
+        </p:style>
+        <p:txBody>
+          <a:bodyPr tIns="180000" rtlCol="0" anchor="t"/>
+          <a:lstStyle/>
+          <a:p>
+            <a:pPr algn="ctr"/>
+            <a:r>
+              <a:rPr lang="en-GB" sz="4200" dirty="0">
+                <a:latin typeface="Sora" pitchFamily="2" charset="0"/>
+                <a:cs typeface="Sora" pitchFamily="2" charset="0"/>
+              </a:rPr>
+              <a:t>3</a:t>
+            </a:r>
+          </a:p>
+          <a:p>
+            <a:pPr algn="ctr"/>
+            <a:r>
+              <a:rPr lang="en-GB" sz="4200" dirty="0">
+                <a:latin typeface="Sora" pitchFamily="2" charset="0"/>
+                <a:cs typeface="Sora" pitchFamily="2" charset="0"/>
+              </a:rPr>
+              <a:t>2</a:t>
+            </a:r>
+          </a:p>
+          <a:p>
+            <a:pPr algn="ctr"/>
+            <a:r>
+              <a:rPr lang="en-GB" sz="4200" dirty="0">
+                <a:latin typeface="Sora" pitchFamily="2" charset="0"/>
+                <a:cs typeface="Sora" pitchFamily="2" charset="0"/>
+              </a:rPr>
+              <a:t>1</a:t>
+            </a:r>
+          </a:p>
+        </p:txBody>
+      </p:sp>
+      <p:sp>
+        <p:nvSpPr>
+          <p:cNvPr id="10" name="Rectangle 9">
+            <a:extLst>
+              <a:ext uri="{FF2B5EF4-FFF2-40B4-BE49-F238E27FC236}">
+                <a16:creationId xmlns:a16="http://schemas.microsoft.com/office/drawing/2014/main" id="{D6D54FB6-63EC-A0C1-5233-37D548C39AD1}"/>
+              </a:ext>
+            </a:extLst>
+          </p:cNvPr>
+          <p:cNvSpPr/>
+          <p:nvPr/>
+        </p:nvSpPr>
+        <p:spPr>
+          <a:xfrm>
+            <a:off x="6289322" y="2529000"/>
+            <a:ext cx="900000" cy="2699997"/>
+          </a:xfrm>
+          <a:prstGeom prst="rect">
+            <a:avLst/>
+          </a:prstGeom>
+          <a:solidFill>
+            <a:schemeClr val="tx2">
+              <a:lumMod val="60000"/>
+              <a:lumOff val="40000"/>
+            </a:schemeClr>
+          </a:solidFill>
+          <a:ln w="63500">
+            <a:solidFill>
+              <a:schemeClr val="tx2"/>
+            </a:solidFill>
+          </a:ln>
+        </p:spPr>
+        <p:style>
+          <a:lnRef idx="2">
+            <a:schemeClr val="accent1">
+              <a:shade val="15000"/>
+            </a:schemeClr>
+          </a:lnRef>
+          <a:fillRef idx="1">
+            <a:schemeClr val="accent1"/>
+          </a:fillRef>
+          <a:effectRef idx="0">
+            <a:schemeClr val="accent1"/>
+          </a:effectRef>
+          <a:fontRef idx="minor">
+            <a:schemeClr val="lt1"/>
+          </a:fontRef>
+        </p:style>
+        <p:txBody>
+          <a:bodyPr tIns="180000" rtlCol="0" anchor="t"/>
+          <a:lstStyle/>
+          <a:p>
+            <a:pPr algn="ctr"/>
+            <a:r>
+              <a:rPr lang="en-GB" sz="4200" dirty="0">
+                <a:latin typeface="Sora" pitchFamily="2" charset="0"/>
+                <a:cs typeface="Sora" pitchFamily="2" charset="0"/>
+              </a:rPr>
+              <a:t>4</a:t>
+            </a:r>
+          </a:p>
+          <a:p>
+            <a:pPr algn="ctr"/>
+            <a:r>
+              <a:rPr lang="en-GB" sz="4200" dirty="0">
+                <a:latin typeface="Sora" pitchFamily="2" charset="0"/>
+                <a:cs typeface="Sora" pitchFamily="2" charset="0"/>
+              </a:rPr>
+              <a:t>3</a:t>
+            </a:r>
+          </a:p>
+          <a:p>
+            <a:pPr algn="ctr"/>
+            <a:r>
+              <a:rPr lang="en-GB" sz="4200" dirty="0">
+                <a:latin typeface="Sora" pitchFamily="2" charset="0"/>
+                <a:cs typeface="Sora" pitchFamily="2" charset="0"/>
+              </a:rPr>
+              <a:t>2</a:t>
+            </a:r>
+          </a:p>
+        </p:txBody>
+      </p:sp>
+      <p:sp>
+        <p:nvSpPr>
+          <p:cNvPr id="2" name="Rectangle 1">
+            <a:extLst>
+              <a:ext uri="{FF2B5EF4-FFF2-40B4-BE49-F238E27FC236}">
+                <a16:creationId xmlns:a16="http://schemas.microsoft.com/office/drawing/2014/main" id="{7229C4B8-5D1A-2532-6F6A-9A1FE63602C2}"/>
+              </a:ext>
+            </a:extLst>
+          </p:cNvPr>
+          <p:cNvSpPr/>
+          <p:nvPr/>
+        </p:nvSpPr>
+        <p:spPr>
+          <a:xfrm>
+            <a:off x="7575966" y="1629000"/>
+            <a:ext cx="900000" cy="2699992"/>
+          </a:xfrm>
+          <a:prstGeom prst="rect">
+            <a:avLst/>
+          </a:prstGeom>
+          <a:solidFill>
+            <a:schemeClr val="tx2">
+              <a:lumMod val="60000"/>
+              <a:lumOff val="40000"/>
+            </a:schemeClr>
+          </a:solidFill>
+          <a:ln w="63500">
+            <a:solidFill>
+              <a:schemeClr val="tx2"/>
+            </a:solidFill>
+          </a:ln>
+        </p:spPr>
+        <p:style>
+          <a:lnRef idx="2">
+            <a:schemeClr val="accent1">
+              <a:shade val="15000"/>
+            </a:schemeClr>
+          </a:lnRef>
+          <a:fillRef idx="1">
+            <a:schemeClr val="accent1"/>
+          </a:fillRef>
+          <a:effectRef idx="0">
+            <a:schemeClr val="accent1"/>
+          </a:effectRef>
+          <a:fontRef idx="minor">
+            <a:schemeClr val="lt1"/>
+          </a:fontRef>
+        </p:style>
+        <p:txBody>
+          <a:bodyPr tIns="180000" rtlCol="0" anchor="t"/>
+          <a:lstStyle/>
+          <a:p>
+            <a:pPr algn="ctr"/>
+            <a:r>
+              <a:rPr lang="en-GB" sz="4200" dirty="0">
+                <a:latin typeface="Sora" pitchFamily="2" charset="0"/>
+                <a:cs typeface="Sora" pitchFamily="2" charset="0"/>
+              </a:rPr>
+              <a:t>5</a:t>
+            </a:r>
+          </a:p>
+          <a:p>
+            <a:pPr algn="ctr"/>
+            <a:r>
+              <a:rPr lang="en-GB" sz="4200" dirty="0">
+                <a:latin typeface="Sora" pitchFamily="2" charset="0"/>
+                <a:cs typeface="Sora" pitchFamily="2" charset="0"/>
+              </a:rPr>
+              <a:t>4</a:t>
+            </a:r>
+          </a:p>
+          <a:p>
+            <a:pPr algn="ctr"/>
+            <a:r>
+              <a:rPr lang="en-GB" sz="4200" dirty="0">
+                <a:latin typeface="Sora" pitchFamily="2" charset="0"/>
+                <a:cs typeface="Sora" pitchFamily="2" charset="0"/>
+              </a:rPr>
+              <a:t>3</a:t>
+            </a:r>
+          </a:p>
+        </p:txBody>
+      </p:sp>
+      <p:sp>
+        <p:nvSpPr>
+          <p:cNvPr id="6" name="Rectangle 5">
+            <a:extLst>
+              <a:ext uri="{FF2B5EF4-FFF2-40B4-BE49-F238E27FC236}">
+                <a16:creationId xmlns:a16="http://schemas.microsoft.com/office/drawing/2014/main" id="{51B9ABA4-C15C-1837-0600-BDC4B4AB09CC}"/>
+              </a:ext>
+            </a:extLst>
+          </p:cNvPr>
+          <p:cNvSpPr/>
+          <p:nvPr/>
+        </p:nvSpPr>
+        <p:spPr>
+          <a:xfrm>
+            <a:off x="8862610" y="729000"/>
+            <a:ext cx="900000" cy="5400000"/>
+          </a:xfrm>
+          <a:prstGeom prst="rect">
+            <a:avLst/>
+          </a:prstGeom>
+          <a:solidFill>
+            <a:srgbClr val="F190F1"/>
+          </a:solidFill>
+          <a:ln w="63500">
+            <a:solidFill>
+              <a:srgbClr val="EF81EF"/>
+            </a:solidFill>
+          </a:ln>
+        </p:spPr>
+        <p:style>
+          <a:lnRef idx="2">
+            <a:schemeClr val="accent1">
+              <a:shade val="15000"/>
+            </a:schemeClr>
+          </a:lnRef>
+          <a:fillRef idx="1">
+            <a:schemeClr val="accent1"/>
+          </a:fillRef>
+          <a:effectRef idx="0">
+            <a:schemeClr val="accent1"/>
+          </a:effectRef>
+          <a:fontRef idx="minor">
+            <a:schemeClr val="lt1"/>
+          </a:fontRef>
+        </p:style>
+        <p:txBody>
+          <a:bodyPr tIns="180000" rtlCol="0" anchor="t"/>
+          <a:lstStyle/>
+          <a:p>
+            <a:pPr algn="ctr"/>
+            <a:r>
+              <a:rPr lang="en-GB" sz="4200" dirty="0">
+                <a:latin typeface="Sora" pitchFamily="2" charset="0"/>
+                <a:cs typeface="Sora" pitchFamily="2" charset="0"/>
+              </a:rPr>
+              <a:t>6</a:t>
+            </a:r>
+          </a:p>
+        </p:txBody>
+      </p:sp>
+      <p:sp>
+        <p:nvSpPr>
+          <p:cNvPr id="3" name="TextBox 2">
+            <a:extLst>
+              <a:ext uri="{FF2B5EF4-FFF2-40B4-BE49-F238E27FC236}">
+                <a16:creationId xmlns:a16="http://schemas.microsoft.com/office/drawing/2014/main" id="{267C6661-B056-319E-7CAF-75048401B1CA}"/>
+              </a:ext>
+            </a:extLst>
+          </p:cNvPr>
+          <p:cNvSpPr txBox="1"/>
+          <p:nvPr/>
+        </p:nvSpPr>
+        <p:spPr>
+          <a:xfrm rot="16200000">
+            <a:off x="-28636" y="2205834"/>
+            <a:ext cx="2363147" cy="646331"/>
+          </a:xfrm>
+          <a:prstGeom prst="rect">
+            <a:avLst/>
+          </a:prstGeom>
+          <a:noFill/>
+        </p:spPr>
+        <p:txBody>
+          <a:bodyPr wrap="none" rtlCol="0">
+            <a:spAutoFit/>
+          </a:bodyPr>
+          <a:lstStyle/>
+          <a:p>
+            <a:r>
+              <a:rPr lang="en-GB" sz="3600" dirty="0">
+                <a:solidFill>
+                  <a:schemeClr val="tx2">
+                    <a:lumMod val="60000"/>
+                    <a:lumOff val="40000"/>
+                  </a:schemeClr>
+                </a:solidFill>
+                <a:latin typeface="Sora" pitchFamily="2" charset="0"/>
+                <a:cs typeface="Sora" pitchFamily="2" charset="0"/>
+              </a:rPr>
+              <a:t>4 VISIBLE</a:t>
+            </a:r>
+          </a:p>
+        </p:txBody>
+      </p:sp>
+      <p:cxnSp>
+        <p:nvCxnSpPr>
+          <p:cNvPr id="4" name="Straight Connector 3">
+            <a:extLst>
+              <a:ext uri="{FF2B5EF4-FFF2-40B4-BE49-F238E27FC236}">
+                <a16:creationId xmlns:a16="http://schemas.microsoft.com/office/drawing/2014/main" id="{A4905344-9BA3-0248-3FC9-09DF00C44F0D}"/>
+              </a:ext>
+            </a:extLst>
+          </p:cNvPr>
+          <p:cNvCxnSpPr>
+            <a:cxnSpLocks/>
+          </p:cNvCxnSpPr>
+          <p:nvPr/>
+        </p:nvCxnSpPr>
+        <p:spPr>
+          <a:xfrm flipH="1">
+            <a:off x="1763485" y="3912326"/>
+            <a:ext cx="3041375" cy="0"/>
+          </a:xfrm>
+          <a:prstGeom prst="line">
+            <a:avLst/>
+          </a:prstGeom>
+          <a:ln w="25400">
+            <a:solidFill>
+              <a:schemeClr val="tx2">
+                <a:lumMod val="20000"/>
+                <a:lumOff val="80000"/>
+              </a:schemeClr>
+            </a:solidFill>
+            <a:prstDash val="dash"/>
+          </a:ln>
+        </p:spPr>
+        <p:style>
+          <a:lnRef idx="2">
+            <a:schemeClr val="accent1"/>
+          </a:lnRef>
+          <a:fillRef idx="0">
+            <a:schemeClr val="accent1"/>
+          </a:fillRef>
+          <a:effectRef idx="1">
+            <a:schemeClr val="accent1"/>
+          </a:effectRef>
+          <a:fontRef idx="minor">
+            <a:schemeClr val="tx1"/>
+          </a:fontRef>
+        </p:style>
+      </p:cxnSp>
+      <p:cxnSp>
+        <p:nvCxnSpPr>
+          <p:cNvPr id="13" name="Straight Connector 12">
+            <a:extLst>
+              <a:ext uri="{FF2B5EF4-FFF2-40B4-BE49-F238E27FC236}">
+                <a16:creationId xmlns:a16="http://schemas.microsoft.com/office/drawing/2014/main" id="{B65D2CB4-595E-603D-E62E-B8265EC0B3FE}"/>
+              </a:ext>
+            </a:extLst>
+          </p:cNvPr>
+          <p:cNvCxnSpPr>
+            <a:cxnSpLocks/>
+          </p:cNvCxnSpPr>
+          <p:nvPr/>
+        </p:nvCxnSpPr>
+        <p:spPr>
+          <a:xfrm flipH="1">
+            <a:off x="1763485" y="3001712"/>
+            <a:ext cx="4421494" cy="0"/>
+          </a:xfrm>
+          <a:prstGeom prst="line">
+            <a:avLst/>
+          </a:prstGeom>
+          <a:ln w="25400">
+            <a:solidFill>
+              <a:schemeClr val="tx2">
+                <a:lumMod val="20000"/>
+                <a:lumOff val="80000"/>
+              </a:schemeClr>
+            </a:solidFill>
+            <a:prstDash val="dash"/>
+          </a:ln>
+        </p:spPr>
+        <p:style>
+          <a:lnRef idx="2">
+            <a:schemeClr val="accent1"/>
+          </a:lnRef>
+          <a:fillRef idx="0">
+            <a:schemeClr val="accent1"/>
+          </a:fillRef>
+          <a:effectRef idx="1">
+            <a:schemeClr val="accent1"/>
+          </a:effectRef>
+          <a:fontRef idx="minor">
+            <a:schemeClr val="tx1"/>
+          </a:fontRef>
+        </p:style>
+      </p:cxnSp>
+      <p:cxnSp>
+        <p:nvCxnSpPr>
+          <p:cNvPr id="14" name="Straight Connector 13">
+            <a:extLst>
+              <a:ext uri="{FF2B5EF4-FFF2-40B4-BE49-F238E27FC236}">
+                <a16:creationId xmlns:a16="http://schemas.microsoft.com/office/drawing/2014/main" id="{054DA2C9-D892-80B3-923B-6BE3A6DCB68D}"/>
+              </a:ext>
+            </a:extLst>
+          </p:cNvPr>
+          <p:cNvCxnSpPr>
+            <a:cxnSpLocks/>
+          </p:cNvCxnSpPr>
+          <p:nvPr/>
+        </p:nvCxnSpPr>
+        <p:spPr>
+          <a:xfrm flipH="1">
+            <a:off x="1763485" y="2091099"/>
+            <a:ext cx="5699382" cy="0"/>
+          </a:xfrm>
+          <a:prstGeom prst="line">
+            <a:avLst/>
+          </a:prstGeom>
+          <a:ln w="25400">
+            <a:solidFill>
+              <a:schemeClr val="tx2">
+                <a:lumMod val="20000"/>
+                <a:lumOff val="80000"/>
+              </a:schemeClr>
+            </a:solidFill>
+            <a:prstDash val="dash"/>
+          </a:ln>
+        </p:spPr>
+        <p:style>
+          <a:lnRef idx="2">
+            <a:schemeClr val="accent1"/>
+          </a:lnRef>
+          <a:fillRef idx="0">
+            <a:schemeClr val="accent1"/>
+          </a:fillRef>
+          <a:effectRef idx="1">
+            <a:schemeClr val="accent1"/>
+          </a:effectRef>
+          <a:fontRef idx="minor">
+            <a:schemeClr val="tx1"/>
+          </a:fontRef>
+        </p:style>
+      </p:cxnSp>
+      <p:cxnSp>
+        <p:nvCxnSpPr>
+          <p:cNvPr id="15" name="Straight Connector 14">
+            <a:extLst>
+              <a:ext uri="{FF2B5EF4-FFF2-40B4-BE49-F238E27FC236}">
+                <a16:creationId xmlns:a16="http://schemas.microsoft.com/office/drawing/2014/main" id="{97D78D03-FEB3-6F55-0B25-88CF3D89BB2C}"/>
+              </a:ext>
+            </a:extLst>
+          </p:cNvPr>
+          <p:cNvCxnSpPr>
+            <a:cxnSpLocks/>
+          </p:cNvCxnSpPr>
+          <p:nvPr/>
+        </p:nvCxnSpPr>
+        <p:spPr>
+          <a:xfrm flipH="1">
+            <a:off x="1763485" y="1180486"/>
+            <a:ext cx="6982950" cy="0"/>
+          </a:xfrm>
+          <a:prstGeom prst="line">
+            <a:avLst/>
+          </a:prstGeom>
+          <a:ln w="25400">
+            <a:solidFill>
+              <a:schemeClr val="tx2">
+                <a:lumMod val="20000"/>
+                <a:lumOff val="80000"/>
+              </a:schemeClr>
+            </a:solidFill>
+            <a:prstDash val="dash"/>
+          </a:ln>
+        </p:spPr>
+        <p:style>
+          <a:lnRef idx="2">
+            <a:schemeClr val="accent1"/>
+          </a:lnRef>
+          <a:fillRef idx="0">
+            <a:schemeClr val="accent1"/>
+          </a:fillRef>
+          <a:effectRef idx="1">
+            <a:schemeClr val="accent1"/>
+          </a:effectRef>
+          <a:fontRef idx="minor">
+            <a:schemeClr val="tx1"/>
+          </a:fontRef>
+        </p:style>
+      </p:cxnSp>
+      <p:cxnSp>
+        <p:nvCxnSpPr>
+          <p:cNvPr id="24" name="Straight Arrow Connector 23">
+            <a:extLst>
+              <a:ext uri="{FF2B5EF4-FFF2-40B4-BE49-F238E27FC236}">
+                <a16:creationId xmlns:a16="http://schemas.microsoft.com/office/drawing/2014/main" id="{BC29B3EE-15A3-C998-263E-DD09FD87E98D}"/>
+              </a:ext>
+            </a:extLst>
+          </p:cNvPr>
+          <p:cNvCxnSpPr>
+            <a:cxnSpLocks/>
+          </p:cNvCxnSpPr>
+          <p:nvPr/>
+        </p:nvCxnSpPr>
+        <p:spPr>
+          <a:xfrm flipV="1">
+            <a:off x="3730014" y="1180486"/>
+            <a:ext cx="6572605" cy="4577680"/>
+          </a:xfrm>
+          <a:prstGeom prst="straightConnector1">
+            <a:avLst/>
+          </a:prstGeom>
+          <a:ln w="127000" cap="rnd">
+            <a:solidFill>
+              <a:srgbClr val="04B4BD">
+                <a:alpha val="50000"/>
+              </a:srgbClr>
+            </a:solidFill>
+            <a:tailEnd type="arrow" w="sm" len="sm"/>
+          </a:ln>
+        </p:spPr>
+        <p:style>
+          <a:lnRef idx="2">
+            <a:schemeClr val="accent1"/>
+          </a:lnRef>
+          <a:fillRef idx="0">
+            <a:schemeClr val="accent1"/>
+          </a:fillRef>
+          <a:effectRef idx="1">
+            <a:schemeClr val="accent1"/>
+          </a:effectRef>
+          <a:fontRef idx="minor">
+            <a:schemeClr val="tx1"/>
+          </a:fontRef>
+        </p:style>
+      </p:cxnSp>
+    </p:spTree>
+    <p:extLst>
+      <p:ext uri="{BB962C8B-B14F-4D97-AF65-F5344CB8AC3E}">
+        <p14:creationId xmlns:p14="http://schemas.microsoft.com/office/powerpoint/2010/main" val="145220233"/>
       </p:ext>
     </p:extLst>
   </p:cSld>
